--- a/seminar/2025/slides/lec01-overview.pptx
+++ b/seminar/2025/slides/lec01-overview.pptx
@@ -5125,8 +5125,8 @@
               <a:t> </a:t>
             </a:r>
             <a:r>
-              <a:rPr lang="en-US" altLang="zh-CN" sz="3600" dirty="0" err="1"/>
-              <a:t>Semiar</a:t>
+              <a:rPr lang="en-US" altLang="zh-CN" sz="3600"/>
+              <a:t>Seminar</a:t>
             </a:r>
             <a:endParaRPr lang="en-US" altLang="zh-CN" sz="3600" dirty="0"/>
           </a:p>
